--- a/templates/posts/november/12-11-2026-thu-li-soil-water-infrastructure.pptx
+++ b/templates/posts/november/12-11-2026-thu-li-soil-water-infrastructure.pptx
@@ -3510,7 +3510,7 @@
       <p:grpSpPr/>
       <p:pic>
         <p:nvPicPr>
-          <p:cNvPr id="2" name="Picture 1" descr="3149764044334361099.jpg"/>
+          <p:cNvPr id="2" name="Picture 1" descr="2174711139715036486.jpg"/>
           <p:cNvPicPr>
             <a:picLocks noChangeAspect="1"/>
           </p:cNvPicPr>
